--- a/docs/presentation/县域医共体信息化平台介绍.pptx
+++ b/docs/presentation/县域医共体信息化平台介绍.pptx
@@ -12208,7 +12208,7 @@
                 <a:ea typeface="微软雅黑" pitchFamily="34" charset="-122"/>
                 <a:cs typeface="微软雅黑" pitchFamily="34" charset="-120"/>
               </a:rPr>
-              <a:t>阈值 70%，低于即阻断构建</a:t>
+              <a:t>行覆盖率实测 92%，阈值 70% 阻断</a:t>
             </a:r>
             <a:endParaRPr lang="en-US" sz="950" dirty="0"/>
           </a:p>
